--- a/SIH_10_Slide_Pitch_Deck.pptx
+++ b/SIH_10_Slide_Pitch_Deck.pptx
@@ -4558,7 +4558,7 @@
                 </a:solidFill>
                 <a:latin typeface="Segoe UI"/>
               </a:rPr>
-              <a:t>github.com/udbhav968-creator/SIH_PROJECT (10/10 tests PASS, 12 commits).</a:t>
+              <a:t>github.com/udbhav968-creator/SIH_PROJECT (356 automated tests pass).</a:t>
             </a:r>
           </a:p>
         </p:txBody>
@@ -5754,7 +5754,7 @@
                 </a:solidFill>
                 <a:latin typeface="Segoe UI"/>
               </a:rPr>
-              <a:t>• Sub-Second Edge Classification: </a:t>
+              <a:t>• Fast CPU Classification: </a:t>
             </a:r>
             <a:r>
               <a:rPr sz="1000" b="0">
@@ -5763,7 +5763,7 @@
                 </a:solidFill>
                 <a:latin typeface="Segoe UI"/>
               </a:rPr>
-              <a:t>Processes frames in 207ms, classifying 9 defect classes (cracks, potholes, waterlogging, signage).</a:t>
+              <a:t>~5 ms per frame on CPU; 7 classes (cracks, potholes, waterlogging, zebra, divider, signs, normal).</a:t>
             </a:r>
           </a:p>
           <a:p>
@@ -5788,7 +5788,7 @@
                 </a:solidFill>
                 <a:latin typeface="Segoe UI"/>
               </a:rPr>
-              <a:t>Regresses standardized 0–100 Pavement Condition Index with 99% correlation to manual surveys.</a:t>
+              <a:t>Standardized 0–100 Pavement Condition Index by the ASTM D6433 deduct-value procedure.</a:t>
             </a:r>
           </a:p>
           <a:p>
@@ -5967,7 +5967,7 @@
                 </a:solidFill>
                 <a:latin typeface="Segoe UI"/>
               </a:rPr>
-              <a:t>Vision and 100Hz vibration cross-validate distress, eliminating 94% false positives.</a:t>
+              <a:t>Vision and 100Hz vibration cross-check each distress; false-positive reduction to be measured in the pilot.</a:t>
             </a:r>
           </a:p>
           <a:p>
@@ -6033,7 +6033,7 @@
                 </a:solidFill>
                 <a:latin typeface="Segoe UI"/>
               </a:rPr>
-              <a:t>5. Pure NumPy Inference on ARM: </a:t>
+              <a:t>5. CPU-Only Inference: </a:t>
             </a:r>
             <a:r>
               <a:rPr sz="1000" b="0">
@@ -6042,7 +6042,7 @@
                 </a:solidFill>
                 <a:latin typeface="Segoe UI"/>
               </a:rPr>
-              <a:t>Runs on standard RPi4 CPUs without requiring heavy GPUs or cloud compute.</a:t>
+              <a:t>ONNX Runtime on standard CPUs—no GPU or cloud compute; Raspberry Pi benchmark in the pilot.</a:t>
             </a:r>
           </a:p>
         </p:txBody>
@@ -6346,7 +6346,7 @@
                 </a:solidFill>
                 <a:latin typeface="Segoe UI"/>
               </a:rPr>
-              <a:t>Python 3.10, Pure NumPy custom matrix forward/backward passes (zero PyTorch/TF dependency at edge).</a:t>
+              <a:t>Python, ONNX Runtime on CPU (no GPU, no PyTorch/TF at inference); CNNs fine-tuned on a Colab T4 GPU.</a:t>
             </a:r>
           </a:p>
           <a:p>
@@ -6666,7 +6666,7 @@
                 </a:solidFill>
                 <a:latin typeface="Segoe UI"/>
               </a:rPr>
-              <a:t>• Stage 4: VisionDistressNet 9-Class: </a:t>
+              <a:t>• Stage 4: Road-Condition CNN: </a:t>
             </a:r>
             <a:r>
               <a:rPr sz="900" b="0">
@@ -6675,7 +6675,7 @@
                 </a:solidFill>
                 <a:latin typeface="Segoe UI"/>
               </a:rPr>
-              <a:t>Custom Transformer-CNN classifies 9 distress classes (79.87% accuracy).</a:t>
+              <a:t>fine-tuned MobileNetV3-Large, 7 classes—94.9% held-out accuracy (92.3% on Indian roads).</a:t>
             </a:r>
           </a:p>
           <a:p>
@@ -6766,7 +6766,7 @@
                 </a:solidFill>
                 <a:latin typeface="Segoe UI"/>
               </a:rPr>
-              <a:t>• Stage 8: ASTM D6433 PCI Regressor: </a:t>
+              <a:t>• Stage 8: ASTM D6433 PCI: </a:t>
             </a:r>
             <a:r>
               <a:rPr sz="900" b="0">
@@ -6775,7 +6775,7 @@
                 </a:solidFill>
                 <a:latin typeface="Segoe UI"/>
               </a:rPr>
-              <a:t>Computes standardized 0–100 PCI rating (R² = 0.99, MAE = 1.42).</a:t>
+              <a:t>standard deduct-value procedure, 0–100 rating (field validation in pilot).</a:t>
             </a:r>
           </a:p>
           <a:p>
@@ -7109,7 +7109,7 @@
                 </a:solidFill>
                 <a:latin typeface="Segoe UI"/>
               </a:rPr>
-              <a:t>1. Pure NumPy Edge AI Engine (Zero GPU Dependency) </a:t>
+              <a:t>1. CPU-Only Edge AI Engine (Zero GPU Dependency) </a:t>
             </a:r>
             <a:r>
               <a:rPr sz="950" b="0">
@@ -7118,7 +7118,7 @@
                 </a:solidFill>
                 <a:latin typeface="Segoe UI"/>
               </a:rPr>
-              <a:t>— Developed custom matrix convolution and self-attention kernels in pure NumPy. Executes in 207ms on low-cost ARM CPUs (Raspberry Pi 4) with zero heavy PyTorch/TF runtime, drawing only 6.4W of power.</a:t>
+              <a:t>— Every network runs on ONNX Runtime on an ordinary CPU, with no PyTorch/TF at inference. The road classifier takes ~5 ms per frame; a full photograph analysis takes ~2 s. On-bus Raspberry Pi benchmarking is part of the pilot.</a:t>
             </a:r>
           </a:p>
         </p:txBody>
@@ -7211,7 +7211,7 @@
                 </a:solidFill>
                 <a:latin typeface="Segoe UI"/>
               </a:rPr>
-              <a:t>— Optical cameras suffer from shadows, puddles, and tar marks. Accelerometers cannot detect upcoming hazards. Our Bayesian fusion cross-correlates both sensor streams, eliminating 94% of false positives.</a:t>
+              <a:t>— Optical cameras suffer from shadows, puddles, and tar marks. Accelerometers cannot see hazards ahead. Our Bayesian gate combines both streams (IMU classifier: 86.6% on real Indian drive logs); its false-positive reduction will be measured on bus data in the pilot.</a:t>
             </a:r>
           </a:p>
         </p:txBody>
@@ -7794,7 +7794,7 @@
                 </a:solidFill>
                 <a:latin typeface="Segoe UI"/>
               </a:rPr>
-              <a:t>YES — because the core AI models and 11-stage pipeline are ALREADY FULLY IMPLEMENTED and tested (10/10 tests pass).</a:t>
+              <a:t>YES — because the core AI models and 11-stage pipeline are ALREADY FULLY IMPLEMENTED and tested (356 automated tests pass).</a:t>
             </a:r>
           </a:p>
           <a:p>
@@ -9120,7 +9120,7 @@
               </a:defRPr>
             </a:pPr>
             <a:r>
-              <a:t>System Verification: 10/10 Tests PASSED</a:t>
+              <a:t>System Verification: 356 Tests PASSED</a:t>
             </a:r>
           </a:p>
         </p:txBody>
@@ -9159,7 +9159,7 @@
                 </a:solidFill>
                 <a:latin typeface="Segoe UI"/>
               </a:rPr>
-              <a:t>• 10/10 Automated Tests Passed: </a:t>
+              <a:t>• 356 Automated Tests Passed: </a:t>
             </a:r>
             <a:r>
               <a:rPr sz="1000" b="0">
@@ -9209,7 +9209,7 @@
                 </a:solidFill>
                 <a:latin typeface="Segoe UI"/>
               </a:rPr>
-              <a:t>• VisionDistressNet Accuracy: </a:t>
+              <a:t>• Road-Condition Classifier Accuracy: </a:t>
             </a:r>
             <a:r>
               <a:rPr sz="1000" b="0">
@@ -9218,7 +9218,7 @@
                 </a:solidFill>
                 <a:latin typeface="Segoe UI"/>
               </a:rPr>
-              <a:t>79.87% multi-class validation accuracy across all 9 pavement distress classes.</a:t>
+              <a:t>94.9% held-out accuracy (macro-F1 0.921), 7 classes; 92.3% on unseen Indian roads.</a:t>
             </a:r>
           </a:p>
           <a:p>
@@ -9234,7 +9234,7 @@
                 </a:solidFill>
                 <a:latin typeface="Segoe UI"/>
               </a:rPr>
-              <a:t>• ASTM D6433 PCI Regression: </a:t>
+              <a:t>• ASTM D6433 PCI: </a:t>
             </a:r>
             <a:r>
               <a:rPr sz="1000" b="0">
@@ -9243,7 +9243,7 @@
                 </a:solidFill>
                 <a:latin typeface="Segoe UI"/>
               </a:rPr>
-              <a:t>R² = 0.99, Mean Absolute Error (MAE) = 1.42 points vs civil ground truth.</a:t>
+              <a:t>standard deduct-value procedure; reproduces the deduct curves, field validation in pilot.</a:t>
             </a:r>
           </a:p>
           <a:p>
@@ -9259,7 +9259,7 @@
                 </a:solidFill>
                 <a:latin typeface="Segoe UI"/>
               </a:rPr>
-              <a:t>• Real-Time CPU Latency: </a:t>
+              <a:t>• CPU Latency (measured): </a:t>
             </a:r>
             <a:r>
               <a:rPr sz="1000" b="0">
@@ -9268,7 +9268,7 @@
                 </a:solidFill>
                 <a:latin typeface="Segoe UI"/>
               </a:rPr>
-              <a:t>207ms average inference per frame on standard CPU.</a:t>
+              <a:t>classifier ~5 ms per frame; full photograph analysis ~2 s.</a:t>
             </a:r>
           </a:p>
           <a:p>
@@ -9293,7 +9293,7 @@
                 </a:solidFill>
                 <a:latin typeface="Segoe UI"/>
               </a:rPr>
-              <a:t>github.com/udbhav968-creator/SIH_PROJECT (12 commits, production ready).</a:t>
+              <a:t>github.com/udbhav968-creator/SIH_PROJECT (open source, 356 automated tests).</a:t>
             </a:r>
           </a:p>
         </p:txBody>

--- a/SIH_10_Slide_Pitch_Deck.pptx
+++ b/SIH_10_Slide_Pitch_Deck.pptx
@@ -6675,7 +6675,7 @@
                 </a:solidFill>
                 <a:latin typeface="Segoe UI"/>
               </a:rPr>
-              <a:t>fine-tuned MobileNetV3-Large, 7 classes—94.9% held-out accuracy (92.3% on Indian roads).</a:t>
+              <a:t>fine-tuned MobileNetV3-Large, 7 classes—94.4% held-out accuracy (92.3% on Indian roads).</a:t>
             </a:r>
           </a:p>
           <a:p>
@@ -9218,7 +9218,7 @@
                 </a:solidFill>
                 <a:latin typeface="Segoe UI"/>
               </a:rPr>
-              <a:t>94.9% held-out accuracy (macro-F1 0.921), 7 classes; 92.3% on unseen Indian roads.</a:t>
+              <a:t>94.4% held-out accuracy (macro-F1 0.879), 7 classes; 92.3% on unseen Indian roads.</a:t>
             </a:r>
           </a:p>
           <a:p>
